--- a/OS 12 Budúcnosť OS.pptx
+++ b/OS 12 Budúcnosť OS.pptx
@@ -149,548 +149,29 @@
 </p:presentation>
 </file>
 
-<file path=ppt/revisionInfo.xml><?xml version="1.0" encoding="utf-8"?>
-<p1510:revInfo xmlns:a="http://schemas.openxmlformats.org/drawingml/2006/main" xmlns:r="http://schemas.openxmlformats.org/officeDocument/2006/relationships" xmlns:p1510="http://schemas.microsoft.com/office/powerpoint/2015/10/main">
-  <p1510:revLst>
-    <p1510:client id="{C02802B7-8EF7-2641-9E50-92813A1749A0}" v="12" dt="2025-04-30T11:33:24.118"/>
-  </p1510:revLst>
-</p1510:revInfo>
-</file>
-
 <file path=ppt/changesInfos/changesInfo1.xml><?xml version="1.0" encoding="utf-8"?>
 <pc:chgInfo xmlns:a="http://schemas.openxmlformats.org/drawingml/2006/main" xmlns:r="http://schemas.openxmlformats.org/officeDocument/2006/relationships" xmlns:ac="http://schemas.microsoft.com/office/drawing/2013/main/command" xmlns:pc="http://schemas.microsoft.com/office/powerpoint/2013/main/command">
   <pc:docChgLst>
-    <pc:chgData name="Baráth, Július" userId="aebde9b9-dccc-4475-a9ac-c05e78323d7a" providerId="ADAL" clId="{C02802B7-8EF7-2641-9E50-92813A1749A0}"/>
-    <pc:docChg chg="undo custSel addSld delSld modSld sldOrd">
-      <pc:chgData name="Baráth, Július" userId="aebde9b9-dccc-4475-a9ac-c05e78323d7a" providerId="ADAL" clId="{C02802B7-8EF7-2641-9E50-92813A1749A0}" dt="2025-04-30T11:33:15.303" v="62"/>
+    <pc:chgData name="Baráth, Július" userId="aebde9b9-dccc-4475-a9ac-c05e78323d7a" providerId="ADAL" clId="{4A0811C8-ED2F-505E-B787-C8270CED5046}"/>
+    <pc:docChg chg="modSld">
+      <pc:chgData name="Baráth, Július" userId="aebde9b9-dccc-4475-a9ac-c05e78323d7a" providerId="ADAL" clId="{4A0811C8-ED2F-505E-B787-C8270CED5046}" dt="2026-04-29T05:43:46.886" v="21" actId="20577"/>
       <pc:docMkLst>
         <pc:docMk/>
       </pc:docMkLst>
       <pc:sldChg chg="modSp mod">
-        <pc:chgData name="Baráth, Július" userId="aebde9b9-dccc-4475-a9ac-c05e78323d7a" providerId="ADAL" clId="{C02802B7-8EF7-2641-9E50-92813A1749A0}" dt="2025-04-30T05:51:22.323" v="1" actId="6549"/>
-        <pc:sldMkLst>
-          <pc:docMk/>
-          <pc:sldMk cId="2556135294" sldId="257"/>
-        </pc:sldMkLst>
-        <pc:spChg chg="mod">
-          <ac:chgData name="Baráth, Július" userId="aebde9b9-dccc-4475-a9ac-c05e78323d7a" providerId="ADAL" clId="{C02802B7-8EF7-2641-9E50-92813A1749A0}" dt="2025-04-30T05:51:22.323" v="1" actId="6549"/>
-          <ac:spMkLst>
-            <pc:docMk/>
-            <pc:sldMk cId="2556135294" sldId="257"/>
-            <ac:spMk id="3" creationId="{25DD7A1D-1AE7-0C26-2C4B-D73206BCA1E1}"/>
-          </ac:spMkLst>
-        </pc:spChg>
-      </pc:sldChg>
-      <pc:sldChg chg="addSp modSp mod">
-        <pc:chgData name="Baráth, Július" userId="aebde9b9-dccc-4475-a9ac-c05e78323d7a" providerId="ADAL" clId="{C02802B7-8EF7-2641-9E50-92813A1749A0}" dt="2025-04-30T06:03:52.909" v="7" actId="14100"/>
-        <pc:sldMkLst>
-          <pc:docMk/>
-          <pc:sldMk cId="1617000686" sldId="260"/>
-        </pc:sldMkLst>
-        <pc:spChg chg="mod">
-          <ac:chgData name="Baráth, Július" userId="aebde9b9-dccc-4475-a9ac-c05e78323d7a" providerId="ADAL" clId="{C02802B7-8EF7-2641-9E50-92813A1749A0}" dt="2025-04-30T06:03:42.821" v="5" actId="1076"/>
-          <ac:spMkLst>
-            <pc:docMk/>
-            <pc:sldMk cId="1617000686" sldId="260"/>
-            <ac:spMk id="3" creationId="{2AE00030-5FB6-AFB4-15F4-071003628204}"/>
-          </ac:spMkLst>
-        </pc:spChg>
-        <pc:picChg chg="add mod">
-          <ac:chgData name="Baráth, Július" userId="aebde9b9-dccc-4475-a9ac-c05e78323d7a" providerId="ADAL" clId="{C02802B7-8EF7-2641-9E50-92813A1749A0}" dt="2025-04-30T06:03:52.909" v="7" actId="14100"/>
-          <ac:picMkLst>
-            <pc:docMk/>
-            <pc:sldMk cId="1617000686" sldId="260"/>
-            <ac:picMk id="6" creationId="{D68E2AB2-778E-FCD2-5B66-3C808EB10128}"/>
-          </ac:picMkLst>
-        </pc:picChg>
-      </pc:sldChg>
-      <pc:sldChg chg="addSp modSp mod">
-        <pc:chgData name="Baráth, Július" userId="aebde9b9-dccc-4475-a9ac-c05e78323d7a" providerId="ADAL" clId="{C02802B7-8EF7-2641-9E50-92813A1749A0}" dt="2025-04-30T07:09:36.910" v="46" actId="1076"/>
-        <pc:sldMkLst>
-          <pc:docMk/>
-          <pc:sldMk cId="425246123" sldId="274"/>
-        </pc:sldMkLst>
-        <pc:spChg chg="add mod">
-          <ac:chgData name="Baráth, Július" userId="aebde9b9-dccc-4475-a9ac-c05e78323d7a" providerId="ADAL" clId="{C02802B7-8EF7-2641-9E50-92813A1749A0}" dt="2025-04-30T07:09:36.910" v="46" actId="1076"/>
-          <ac:spMkLst>
-            <pc:docMk/>
-            <pc:sldMk cId="425246123" sldId="274"/>
-            <ac:spMk id="6" creationId="{696867B8-F72D-AE66-BB63-208BD4237AF1}"/>
-          </ac:spMkLst>
-        </pc:spChg>
-      </pc:sldChg>
-      <pc:sldChg chg="modSp mod">
-        <pc:chgData name="Baráth, Július" userId="aebde9b9-dccc-4475-a9ac-c05e78323d7a" providerId="ADAL" clId="{C02802B7-8EF7-2641-9E50-92813A1749A0}" dt="2025-04-30T07:10:27.977" v="49" actId="20577"/>
-        <pc:sldMkLst>
-          <pc:docMk/>
-          <pc:sldMk cId="3560240574" sldId="280"/>
-        </pc:sldMkLst>
-        <pc:spChg chg="mod">
-          <ac:chgData name="Baráth, Július" userId="aebde9b9-dccc-4475-a9ac-c05e78323d7a" providerId="ADAL" clId="{C02802B7-8EF7-2641-9E50-92813A1749A0}" dt="2025-04-30T07:10:27.977" v="49" actId="20577"/>
-          <ac:spMkLst>
-            <pc:docMk/>
-            <pc:sldMk cId="3560240574" sldId="280"/>
-            <ac:spMk id="2" creationId="{F03FA90A-EE90-0238-41F2-60C6C9824B03}"/>
-          </ac:spMkLst>
-        </pc:spChg>
-      </pc:sldChg>
-      <pc:sldChg chg="modSp mod">
-        <pc:chgData name="Baráth, Július" userId="aebde9b9-dccc-4475-a9ac-c05e78323d7a" providerId="ADAL" clId="{C02802B7-8EF7-2641-9E50-92813A1749A0}" dt="2025-04-30T06:04:54.424" v="11" actId="6549"/>
-        <pc:sldMkLst>
-          <pc:docMk/>
-          <pc:sldMk cId="2982881106" sldId="282"/>
-        </pc:sldMkLst>
-        <pc:spChg chg="mod">
-          <ac:chgData name="Baráth, Július" userId="aebde9b9-dccc-4475-a9ac-c05e78323d7a" providerId="ADAL" clId="{C02802B7-8EF7-2641-9E50-92813A1749A0}" dt="2025-04-30T06:04:54.424" v="11" actId="6549"/>
-          <ac:spMkLst>
-            <pc:docMk/>
-            <pc:sldMk cId="2982881106" sldId="282"/>
-            <ac:spMk id="3" creationId="{D1205C71-F807-130C-6DDD-D40964D9DC39}"/>
-          </ac:spMkLst>
-        </pc:spChg>
-      </pc:sldChg>
-      <pc:sldChg chg="addSp delSp modSp mod ord">
-        <pc:chgData name="Baráth, Július" userId="aebde9b9-dccc-4475-a9ac-c05e78323d7a" providerId="ADAL" clId="{C02802B7-8EF7-2641-9E50-92813A1749A0}" dt="2025-04-30T11:32:38.010" v="57"/>
-        <pc:sldMkLst>
-          <pc:docMk/>
-          <pc:sldMk cId="931880253" sldId="284"/>
-        </pc:sldMkLst>
-        <pc:spChg chg="add mod">
-          <ac:chgData name="Baráth, Július" userId="aebde9b9-dccc-4475-a9ac-c05e78323d7a" providerId="ADAL" clId="{C02802B7-8EF7-2641-9E50-92813A1749A0}" dt="2025-04-30T06:08:29.169" v="29" actId="1076"/>
-          <ac:spMkLst>
-            <pc:docMk/>
-            <pc:sldMk cId="931880253" sldId="284"/>
-            <ac:spMk id="4" creationId="{E615117F-6E77-F13B-4E64-5DCD3BC37603}"/>
-          </ac:spMkLst>
-        </pc:spChg>
-        <pc:graphicFrameChg chg="add del">
-          <ac:chgData name="Baráth, Július" userId="aebde9b9-dccc-4475-a9ac-c05e78323d7a" providerId="ADAL" clId="{C02802B7-8EF7-2641-9E50-92813A1749A0}" dt="2025-04-30T11:32:38.010" v="57"/>
-          <ac:graphicFrameMkLst>
-            <pc:docMk/>
-            <pc:sldMk cId="931880253" sldId="284"/>
-            <ac:graphicFrameMk id="6" creationId="{B2758A6B-CC97-09AD-34A0-39A6701ABB61}"/>
-          </ac:graphicFrameMkLst>
-        </pc:graphicFrameChg>
-      </pc:sldChg>
-      <pc:sldChg chg="addSp delSp modSp mod">
-        <pc:chgData name="Baráth, Július" userId="aebde9b9-dccc-4475-a9ac-c05e78323d7a" providerId="ADAL" clId="{C02802B7-8EF7-2641-9E50-92813A1749A0}" dt="2025-04-30T11:32:06.308" v="53"/>
-        <pc:sldMkLst>
-          <pc:docMk/>
-          <pc:sldMk cId="641753757" sldId="286"/>
-        </pc:sldMkLst>
-        <pc:spChg chg="add mod">
-          <ac:chgData name="Baráth, Július" userId="aebde9b9-dccc-4475-a9ac-c05e78323d7a" providerId="ADAL" clId="{C02802B7-8EF7-2641-9E50-92813A1749A0}" dt="2025-04-30T06:09:26.495" v="37" actId="1076"/>
-          <ac:spMkLst>
-            <pc:docMk/>
-            <pc:sldMk cId="641753757" sldId="286"/>
-            <ac:spMk id="6" creationId="{576C40D7-2E57-2C40-AC63-775C24DA46C9}"/>
-          </ac:spMkLst>
-        </pc:spChg>
-        <pc:graphicFrameChg chg="add del">
-          <ac:chgData name="Baráth, Július" userId="aebde9b9-dccc-4475-a9ac-c05e78323d7a" providerId="ADAL" clId="{C02802B7-8EF7-2641-9E50-92813A1749A0}" dt="2025-04-30T11:32:06.308" v="53"/>
-          <ac:graphicFrameMkLst>
-            <pc:docMk/>
-            <pc:sldMk cId="641753757" sldId="286"/>
-            <ac:graphicFrameMk id="5" creationId="{712AE91F-3134-7AE4-2B8E-6DB0FFF6E146}"/>
-          </ac:graphicFrameMkLst>
-        </pc:graphicFrameChg>
-      </pc:sldChg>
-      <pc:sldChg chg="new del">
-        <pc:chgData name="Baráth, Július" userId="aebde9b9-dccc-4475-a9ac-c05e78323d7a" providerId="ADAL" clId="{C02802B7-8EF7-2641-9E50-92813A1749A0}" dt="2025-04-30T11:32:35.911" v="55" actId="680"/>
-        <pc:sldMkLst>
-          <pc:docMk/>
-          <pc:sldMk cId="3650613536" sldId="292"/>
-        </pc:sldMkLst>
-      </pc:sldChg>
-      <pc:sldChg chg="new del">
-        <pc:chgData name="Baráth, Július" userId="aebde9b9-dccc-4475-a9ac-c05e78323d7a" providerId="ADAL" clId="{C02802B7-8EF7-2641-9E50-92813A1749A0}" dt="2025-04-30T11:33:01.627" v="60" actId="2696"/>
-        <pc:sldMkLst>
-          <pc:docMk/>
-          <pc:sldMk cId="3760439712" sldId="292"/>
-        </pc:sldMkLst>
-      </pc:sldChg>
-      <pc:sldChg chg="add">
-        <pc:chgData name="Baráth, Július" userId="aebde9b9-dccc-4475-a9ac-c05e78323d7a" providerId="ADAL" clId="{C02802B7-8EF7-2641-9E50-92813A1749A0}" dt="2025-04-30T11:32:51.416" v="59"/>
-        <pc:sldMkLst>
-          <pc:docMk/>
-          <pc:sldMk cId="179040411" sldId="293"/>
-        </pc:sldMkLst>
-      </pc:sldChg>
-      <pc:sldChg chg="addSp new">
-        <pc:chgData name="Baráth, Július" userId="aebde9b9-dccc-4475-a9ac-c05e78323d7a" providerId="ADAL" clId="{C02802B7-8EF7-2641-9E50-92813A1749A0}" dt="2025-04-30T11:33:15.303" v="62"/>
-        <pc:sldMkLst>
-          <pc:docMk/>
-          <pc:sldMk cId="3724716238" sldId="294"/>
-        </pc:sldMkLst>
-        <pc:graphicFrameChg chg="add">
-          <ac:chgData name="Baráth, Július" userId="aebde9b9-dccc-4475-a9ac-c05e78323d7a" providerId="ADAL" clId="{C02802B7-8EF7-2641-9E50-92813A1749A0}" dt="2025-04-30T11:33:15.303" v="62"/>
-          <ac:graphicFrameMkLst>
-            <pc:docMk/>
-            <pc:sldMk cId="3724716238" sldId="294"/>
-            <ac:graphicFrameMk id="2" creationId="{5F2DEB6D-0C12-7C4A-2C18-9D41D5A08765}"/>
-          </ac:graphicFrameMkLst>
-        </pc:graphicFrameChg>
-      </pc:sldChg>
-    </pc:docChg>
-  </pc:docChgLst>
-  <pc:docChgLst>
-    <pc:chgData name="Baráth, Július" userId="aebde9b9-dccc-4475-a9ac-c05e78323d7a" providerId="ADAL" clId="{C5528944-2E53-F544-B48B-F2417BB84345}"/>
-    <pc:docChg chg="undo custSel addSld delSld modSld sldOrd">
-      <pc:chgData name="Baráth, Július" userId="aebde9b9-dccc-4475-a9ac-c05e78323d7a" providerId="ADAL" clId="{C5528944-2E53-F544-B48B-F2417BB84345}" dt="2024-04-16T10:38:33.606" v="1017" actId="1076"/>
-      <pc:docMkLst>
-        <pc:docMk/>
-      </pc:docMkLst>
-      <pc:sldChg chg="del">
-        <pc:chgData name="Baráth, Július" userId="aebde9b9-dccc-4475-a9ac-c05e78323d7a" providerId="ADAL" clId="{C5528944-2E53-F544-B48B-F2417BB84345}" dt="2024-04-16T08:34:55.498" v="628" actId="2696"/>
-        <pc:sldMkLst>
-          <pc:docMk/>
-          <pc:sldMk cId="3676557245" sldId="256"/>
-        </pc:sldMkLst>
-      </pc:sldChg>
-      <pc:sldChg chg="addSp delSp modSp new mod chgLayout">
-        <pc:chgData name="Baráth, Július" userId="aebde9b9-dccc-4475-a9ac-c05e78323d7a" providerId="ADAL" clId="{C5528944-2E53-F544-B48B-F2417BB84345}" dt="2024-04-16T10:28:52.842" v="955" actId="20577"/>
-        <pc:sldMkLst>
-          <pc:docMk/>
-          <pc:sldMk cId="2556135294" sldId="257"/>
-        </pc:sldMkLst>
-      </pc:sldChg>
-      <pc:sldChg chg="addSp delSp modSp new mod chgLayout">
-        <pc:chgData name="Baráth, Július" userId="aebde9b9-dccc-4475-a9ac-c05e78323d7a" providerId="ADAL" clId="{C5528944-2E53-F544-B48B-F2417BB84345}" dt="2024-04-16T08:48:58.970" v="736" actId="790"/>
-        <pc:sldMkLst>
-          <pc:docMk/>
-          <pc:sldMk cId="1543367347" sldId="258"/>
-        </pc:sldMkLst>
-      </pc:sldChg>
-      <pc:sldChg chg="modSp add mod modNotes">
-        <pc:chgData name="Baráth, Július" userId="aebde9b9-dccc-4475-a9ac-c05e78323d7a" providerId="ADAL" clId="{C5528944-2E53-F544-B48B-F2417BB84345}" dt="2024-04-16T08:50:00.043" v="739" actId="113"/>
-        <pc:sldMkLst>
-          <pc:docMk/>
-          <pc:sldMk cId="3804899954" sldId="259"/>
-        </pc:sldMkLst>
-      </pc:sldChg>
-      <pc:sldChg chg="addSp modSp add mod modNotes">
-        <pc:chgData name="Baráth, Július" userId="aebde9b9-dccc-4475-a9ac-c05e78323d7a" providerId="ADAL" clId="{C5528944-2E53-F544-B48B-F2417BB84345}" dt="2024-04-16T10:33:03.179" v="1006" actId="1076"/>
-        <pc:sldMkLst>
-          <pc:docMk/>
-          <pc:sldMk cId="1617000686" sldId="260"/>
-        </pc:sldMkLst>
-      </pc:sldChg>
-      <pc:sldChg chg="addSp delSp modSp add mod chgLayout modNotes">
-        <pc:chgData name="Baráth, Július" userId="aebde9b9-dccc-4475-a9ac-c05e78323d7a" providerId="ADAL" clId="{C5528944-2E53-F544-B48B-F2417BB84345}" dt="2024-04-16T08:58:32.562" v="788" actId="20577"/>
+        <pc:chgData name="Baráth, Július" userId="aebde9b9-dccc-4475-a9ac-c05e78323d7a" providerId="ADAL" clId="{4A0811C8-ED2F-505E-B787-C8270CED5046}" dt="2026-04-29T05:43:46.886" v="21" actId="20577"/>
         <pc:sldMkLst>
           <pc:docMk/>
           <pc:sldMk cId="3948804769" sldId="261"/>
         </pc:sldMkLst>
-      </pc:sldChg>
-      <pc:sldChg chg="addSp delSp modSp add mod chgLayout modNotes">
-        <pc:chgData name="Baráth, Július" userId="aebde9b9-dccc-4475-a9ac-c05e78323d7a" providerId="ADAL" clId="{C5528944-2E53-F544-B48B-F2417BB84345}" dt="2024-04-16T09:03:10.141" v="806" actId="20577"/>
-        <pc:sldMkLst>
-          <pc:docMk/>
-          <pc:sldMk cId="3269311343" sldId="262"/>
-        </pc:sldMkLst>
-      </pc:sldChg>
-      <pc:sldChg chg="addSp modSp add mod ord modNotes">
-        <pc:chgData name="Baráth, Július" userId="aebde9b9-dccc-4475-a9ac-c05e78323d7a" providerId="ADAL" clId="{C5528944-2E53-F544-B48B-F2417BB84345}" dt="2024-04-16T10:38:24.689" v="1015" actId="1076"/>
-        <pc:sldMkLst>
-          <pc:docMk/>
-          <pc:sldMk cId="2612326313" sldId="263"/>
-        </pc:sldMkLst>
-      </pc:sldChg>
-      <pc:sldChg chg="addSp delSp modSp add mod chgLayout modNotes">
-        <pc:chgData name="Baráth, Július" userId="aebde9b9-dccc-4475-a9ac-c05e78323d7a" providerId="ADAL" clId="{C5528944-2E53-F544-B48B-F2417BB84345}" dt="2024-04-16T09:04:32.391" v="809" actId="790"/>
-        <pc:sldMkLst>
-          <pc:docMk/>
-          <pc:sldMk cId="3391756110" sldId="264"/>
-        </pc:sldMkLst>
-      </pc:sldChg>
-      <pc:sldChg chg="modSp add modNotes">
-        <pc:chgData name="Baráth, Július" userId="aebde9b9-dccc-4475-a9ac-c05e78323d7a" providerId="ADAL" clId="{C5528944-2E53-F544-B48B-F2417BB84345}" dt="2024-04-16T09:06:36.061" v="816" actId="20577"/>
-        <pc:sldMkLst>
-          <pc:docMk/>
-          <pc:sldMk cId="1830443320" sldId="265"/>
-        </pc:sldMkLst>
-      </pc:sldChg>
-      <pc:sldChg chg="addSp delSp modSp add mod chgLayout modNotes">
-        <pc:chgData name="Baráth, Július" userId="aebde9b9-dccc-4475-a9ac-c05e78323d7a" providerId="ADAL" clId="{C5528944-2E53-F544-B48B-F2417BB84345}" dt="2024-04-16T10:15:15.971" v="911" actId="313"/>
-        <pc:sldMkLst>
-          <pc:docMk/>
-          <pc:sldMk cId="4116382956" sldId="266"/>
-        </pc:sldMkLst>
-      </pc:sldChg>
-      <pc:sldChg chg="modSp add modNotes">
-        <pc:chgData name="Baráth, Július" userId="aebde9b9-dccc-4475-a9ac-c05e78323d7a" providerId="ADAL" clId="{C5528944-2E53-F544-B48B-F2417BB84345}" dt="2024-04-16T09:12:48.833" v="835"/>
-        <pc:sldMkLst>
-          <pc:docMk/>
-          <pc:sldMk cId="4015885166" sldId="267"/>
-        </pc:sldMkLst>
-      </pc:sldChg>
-      <pc:sldChg chg="modSp add modNotes">
-        <pc:chgData name="Baráth, Július" userId="aebde9b9-dccc-4475-a9ac-c05e78323d7a" providerId="ADAL" clId="{C5528944-2E53-F544-B48B-F2417BB84345}" dt="2024-04-16T08:14:21.947" v="501" actId="20577"/>
-        <pc:sldMkLst>
-          <pc:docMk/>
-          <pc:sldMk cId="313600302" sldId="268"/>
-        </pc:sldMkLst>
-      </pc:sldChg>
-      <pc:sldChg chg="modSp add del modNotes">
-        <pc:chgData name="Baráth, Július" userId="aebde9b9-dccc-4475-a9ac-c05e78323d7a" providerId="ADAL" clId="{C5528944-2E53-F544-B48B-F2417BB84345}" dt="2024-04-16T07:50:15.390" v="314" actId="2696"/>
-        <pc:sldMkLst>
-          <pc:docMk/>
-          <pc:sldMk cId="3647286207" sldId="269"/>
-        </pc:sldMkLst>
-      </pc:sldChg>
-      <pc:sldChg chg="add del">
-        <pc:chgData name="Baráth, Július" userId="aebde9b9-dccc-4475-a9ac-c05e78323d7a" providerId="ADAL" clId="{C5528944-2E53-F544-B48B-F2417BB84345}" dt="2024-04-16T09:17:27.044" v="862"/>
-        <pc:sldMkLst>
-          <pc:docMk/>
-          <pc:sldMk cId="0" sldId="270"/>
-        </pc:sldMkLst>
-      </pc:sldChg>
-      <pc:sldChg chg="addSp delSp modSp add del mod chgLayout modNotes">
-        <pc:chgData name="Baráth, Július" userId="aebde9b9-dccc-4475-a9ac-c05e78323d7a" providerId="ADAL" clId="{C5528944-2E53-F544-B48B-F2417BB84345}" dt="2024-04-16T07:51:07.401" v="324" actId="2696"/>
-        <pc:sldMkLst>
-          <pc:docMk/>
-          <pc:sldMk cId="987098213" sldId="270"/>
-        </pc:sldMkLst>
-      </pc:sldChg>
-      <pc:sldChg chg="addSp delSp modSp add mod chgLayout modNotes">
-        <pc:chgData name="Baráth, Július" userId="aebde9b9-dccc-4475-a9ac-c05e78323d7a" providerId="ADAL" clId="{C5528944-2E53-F544-B48B-F2417BB84345}" dt="2024-04-16T10:37:05.620" v="1009"/>
-        <pc:sldMkLst>
-          <pc:docMk/>
-          <pc:sldMk cId="2496386514" sldId="271"/>
-        </pc:sldMkLst>
-      </pc:sldChg>
-      <pc:sldChg chg="addSp delSp modSp add mod chgLayout modNotes">
-        <pc:chgData name="Baráth, Július" userId="aebde9b9-dccc-4475-a9ac-c05e78323d7a" providerId="ADAL" clId="{C5528944-2E53-F544-B48B-F2417BB84345}" dt="2024-04-16T09:03:29.948" v="807" actId="790"/>
-        <pc:sldMkLst>
-          <pc:docMk/>
-          <pc:sldMk cId="425500702" sldId="272"/>
-        </pc:sldMkLst>
-      </pc:sldChg>
-      <pc:sldChg chg="modSp add del modNotes">
-        <pc:chgData name="Baráth, Július" userId="aebde9b9-dccc-4475-a9ac-c05e78323d7a" providerId="ADAL" clId="{C5528944-2E53-F544-B48B-F2417BB84345}" dt="2024-04-16T07:52:21.578" v="343" actId="2696"/>
-        <pc:sldMkLst>
-          <pc:docMk/>
-          <pc:sldMk cId="1854854054" sldId="273"/>
-        </pc:sldMkLst>
-      </pc:sldChg>
-      <pc:sldChg chg="modSp add modNotes">
-        <pc:chgData name="Baráth, Július" userId="aebde9b9-dccc-4475-a9ac-c05e78323d7a" providerId="ADAL" clId="{C5528944-2E53-F544-B48B-F2417BB84345}" dt="2024-04-16T09:05:26.334" v="812" actId="20577"/>
-        <pc:sldMkLst>
-          <pc:docMk/>
-          <pc:sldMk cId="2868611546" sldId="273"/>
-        </pc:sldMkLst>
-      </pc:sldChg>
-      <pc:sldChg chg="modSp add del modNotes">
-        <pc:chgData name="Baráth, Július" userId="aebde9b9-dccc-4475-a9ac-c05e78323d7a" providerId="ADAL" clId="{C5528944-2E53-F544-B48B-F2417BB84345}" dt="2024-04-16T07:53:20.486" v="354" actId="2696"/>
-        <pc:sldMkLst>
-          <pc:docMk/>
-          <pc:sldMk cId="2925578459" sldId="273"/>
-        </pc:sldMkLst>
-      </pc:sldChg>
-      <pc:sldChg chg="addSp modSp add modNotes">
-        <pc:chgData name="Baráth, Július" userId="aebde9b9-dccc-4475-a9ac-c05e78323d7a" providerId="ADAL" clId="{C5528944-2E53-F544-B48B-F2417BB84345}" dt="2024-04-16T10:37:28.149" v="1010"/>
-        <pc:sldMkLst>
-          <pc:docMk/>
-          <pc:sldMk cId="425246123" sldId="274"/>
-        </pc:sldMkLst>
-      </pc:sldChg>
-      <pc:sldChg chg="add del">
-        <pc:chgData name="Baráth, Július" userId="aebde9b9-dccc-4475-a9ac-c05e78323d7a" providerId="ADAL" clId="{C5528944-2E53-F544-B48B-F2417BB84345}" dt="2024-04-16T07:55:25.491" v="384"/>
-        <pc:sldMkLst>
-          <pc:docMk/>
-          <pc:sldMk cId="423944476" sldId="275"/>
-        </pc:sldMkLst>
-      </pc:sldChg>
-      <pc:sldChg chg="modSp add del modNotes">
-        <pc:chgData name="Baráth, Július" userId="aebde9b9-dccc-4475-a9ac-c05e78323d7a" providerId="ADAL" clId="{C5528944-2E53-F544-B48B-F2417BB84345}" dt="2024-04-16T07:56:56.386" v="395" actId="2696"/>
-        <pc:sldMkLst>
-          <pc:docMk/>
-          <pc:sldMk cId="1058245576" sldId="275"/>
-        </pc:sldMkLst>
-      </pc:sldChg>
-      <pc:sldChg chg="addSp delSp modSp add mod chgLayout modNotes">
-        <pc:chgData name="Baráth, Július" userId="aebde9b9-dccc-4475-a9ac-c05e78323d7a" providerId="ADAL" clId="{C5528944-2E53-F544-B48B-F2417BB84345}" dt="2024-04-16T09:07:20.281" v="824" actId="20577"/>
-        <pc:sldMkLst>
-          <pc:docMk/>
-          <pc:sldMk cId="3484314516" sldId="275"/>
-        </pc:sldMkLst>
-      </pc:sldChg>
-      <pc:sldChg chg="add del">
-        <pc:chgData name="Baráth, Július" userId="aebde9b9-dccc-4475-a9ac-c05e78323d7a" providerId="ADAL" clId="{C5528944-2E53-F544-B48B-F2417BB84345}" dt="2024-04-16T07:55:22.961" v="383"/>
-        <pc:sldMkLst>
-          <pc:docMk/>
-          <pc:sldMk cId="238486302" sldId="276"/>
-        </pc:sldMkLst>
-      </pc:sldChg>
-      <pc:sldChg chg="addSp delSp modSp add mod chgLayout modNotes">
-        <pc:chgData name="Baráth, Július" userId="aebde9b9-dccc-4475-a9ac-c05e78323d7a" providerId="ADAL" clId="{C5528944-2E53-F544-B48B-F2417BB84345}" dt="2024-04-16T10:37:38.059" v="1011"/>
-        <pc:sldMkLst>
-          <pc:docMk/>
-          <pc:sldMk cId="2455965113" sldId="276"/>
-        </pc:sldMkLst>
-      </pc:sldChg>
-      <pc:sldChg chg="addSp delSp modSp add mod chgLayout modNotes">
-        <pc:chgData name="Baráth, Július" userId="aebde9b9-dccc-4475-a9ac-c05e78323d7a" providerId="ADAL" clId="{C5528944-2E53-F544-B48B-F2417BB84345}" dt="2024-04-16T09:10:42.478" v="831" actId="790"/>
-        <pc:sldMkLst>
-          <pc:docMk/>
-          <pc:sldMk cId="1643663824" sldId="277"/>
-        </pc:sldMkLst>
-      </pc:sldChg>
-      <pc:sldChg chg="add del">
-        <pc:chgData name="Baráth, Július" userId="aebde9b9-dccc-4475-a9ac-c05e78323d7a" providerId="ADAL" clId="{C5528944-2E53-F544-B48B-F2417BB84345}" dt="2024-04-16T07:55:18.326" v="382"/>
-        <pc:sldMkLst>
-          <pc:docMk/>
-          <pc:sldMk cId="2904672390" sldId="277"/>
-        </pc:sldMkLst>
-      </pc:sldChg>
-      <pc:sldChg chg="modSp add del modNotes">
-        <pc:chgData name="Baráth, Július" userId="aebde9b9-dccc-4475-a9ac-c05e78323d7a" providerId="ADAL" clId="{C5528944-2E53-F544-B48B-F2417BB84345}" dt="2024-04-16T07:58:25.811" v="412" actId="2696"/>
-        <pc:sldMkLst>
-          <pc:docMk/>
-          <pc:sldMk cId="3752938666" sldId="277"/>
-        </pc:sldMkLst>
-      </pc:sldChg>
-      <pc:sldChg chg="addSp delSp modSp add mod chgLayout modNotes">
-        <pc:chgData name="Baráth, Július" userId="aebde9b9-dccc-4475-a9ac-c05e78323d7a" providerId="ADAL" clId="{C5528944-2E53-F544-B48B-F2417BB84345}" dt="2024-04-16T10:37:48.015" v="1012"/>
-        <pc:sldMkLst>
-          <pc:docMk/>
-          <pc:sldMk cId="2362204730" sldId="278"/>
-        </pc:sldMkLst>
-      </pc:sldChg>
-      <pc:sldChg chg="addSp delSp modSp add mod chgLayout modNotes">
-        <pc:chgData name="Baráth, Július" userId="aebde9b9-dccc-4475-a9ac-c05e78323d7a" providerId="ADAL" clId="{C5528944-2E53-F544-B48B-F2417BB84345}" dt="2024-04-16T10:15:31.515" v="912" actId="790"/>
-        <pc:sldMkLst>
-          <pc:docMk/>
-          <pc:sldMk cId="2925803120" sldId="279"/>
-        </pc:sldMkLst>
-      </pc:sldChg>
-      <pc:sldChg chg="modSp add del modNotes">
-        <pc:chgData name="Baráth, Július" userId="aebde9b9-dccc-4475-a9ac-c05e78323d7a" providerId="ADAL" clId="{C5528944-2E53-F544-B48B-F2417BB84345}" dt="2024-04-16T08:01:09.899" v="448" actId="2696"/>
-        <pc:sldMkLst>
-          <pc:docMk/>
-          <pc:sldMk cId="4276453877" sldId="279"/>
-        </pc:sldMkLst>
-      </pc:sldChg>
-      <pc:sldChg chg="addSp delSp modSp add mod chgLayout modNotes">
-        <pc:chgData name="Baráth, Július" userId="aebde9b9-dccc-4475-a9ac-c05e78323d7a" providerId="ADAL" clId="{C5528944-2E53-F544-B48B-F2417BB84345}" dt="2024-04-16T10:38:09.674" v="1013"/>
-        <pc:sldMkLst>
-          <pc:docMk/>
-          <pc:sldMk cId="3560240574" sldId="280"/>
-        </pc:sldMkLst>
-      </pc:sldChg>
-      <pc:sldChg chg="addSp modSp add mod modNotes">
-        <pc:chgData name="Baráth, Július" userId="aebde9b9-dccc-4475-a9ac-c05e78323d7a" providerId="ADAL" clId="{C5528944-2E53-F544-B48B-F2417BB84345}" dt="2024-04-16T10:38:33.606" v="1017" actId="1076"/>
-        <pc:sldMkLst>
-          <pc:docMk/>
-          <pc:sldMk cId="292514395" sldId="281"/>
-        </pc:sldMkLst>
-      </pc:sldChg>
-      <pc:sldChg chg="addSp delSp modSp add mod chgLayout modNotes">
-        <pc:chgData name="Baráth, Július" userId="aebde9b9-dccc-4475-a9ac-c05e78323d7a" providerId="ADAL" clId="{C5528944-2E53-F544-B48B-F2417BB84345}" dt="2024-04-16T08:24:04.802" v="546" actId="27636"/>
-        <pc:sldMkLst>
-          <pc:docMk/>
-          <pc:sldMk cId="2982881106" sldId="282"/>
-        </pc:sldMkLst>
-      </pc:sldChg>
-      <pc:sldChg chg="modSp add del modNotes">
-        <pc:chgData name="Baráth, Július" userId="aebde9b9-dccc-4475-a9ac-c05e78323d7a" providerId="ADAL" clId="{C5528944-2E53-F544-B48B-F2417BB84345}" dt="2024-04-16T08:21:22.552" v="509" actId="2696"/>
-        <pc:sldMkLst>
-          <pc:docMk/>
-          <pc:sldMk cId="3150010718" sldId="282"/>
-        </pc:sldMkLst>
-      </pc:sldChg>
-      <pc:sldChg chg="modSp add mod modNotes">
-        <pc:chgData name="Baráth, Július" userId="aebde9b9-dccc-4475-a9ac-c05e78323d7a" providerId="ADAL" clId="{C5528944-2E53-F544-B48B-F2417BB84345}" dt="2024-04-16T09:01:30.237" v="797" actId="20577"/>
-        <pc:sldMkLst>
-          <pc:docMk/>
-          <pc:sldMk cId="3679702209" sldId="283"/>
-        </pc:sldMkLst>
-      </pc:sldChg>
-      <pc:sldChg chg="addSp modSp new mod">
-        <pc:chgData name="Baráth, Július" userId="aebde9b9-dccc-4475-a9ac-c05e78323d7a" providerId="ADAL" clId="{C5528944-2E53-F544-B48B-F2417BB84345}" dt="2024-04-16T08:44:51.576" v="727" actId="1076"/>
-        <pc:sldMkLst>
-          <pc:docMk/>
-          <pc:sldMk cId="931880253" sldId="284"/>
-        </pc:sldMkLst>
-      </pc:sldChg>
-      <pc:sldChg chg="modSp add del modNotes">
-        <pc:chgData name="Baráth, Július" userId="aebde9b9-dccc-4475-a9ac-c05e78323d7a" providerId="ADAL" clId="{C5528944-2E53-F544-B48B-F2417BB84345}" dt="2024-04-16T08:27:38.391" v="549" actId="2696"/>
-        <pc:sldMkLst>
-          <pc:docMk/>
-          <pc:sldMk cId="1191617480" sldId="284"/>
-        </pc:sldMkLst>
-      </pc:sldChg>
-      <pc:sldChg chg="modSp add del modNotes">
-        <pc:chgData name="Baráth, Július" userId="aebde9b9-dccc-4475-a9ac-c05e78323d7a" providerId="ADAL" clId="{C5528944-2E53-F544-B48B-F2417BB84345}" dt="2024-04-16T08:31:25.093" v="587" actId="2696"/>
-        <pc:sldMkLst>
-          <pc:docMk/>
-          <pc:sldMk cId="3559964208" sldId="284"/>
-        </pc:sldMkLst>
-      </pc:sldChg>
-      <pc:sldChg chg="addSp modSp new mod">
-        <pc:chgData name="Baráth, Július" userId="aebde9b9-dccc-4475-a9ac-c05e78323d7a" providerId="ADAL" clId="{C5528944-2E53-F544-B48B-F2417BB84345}" dt="2024-04-16T08:37:33.164" v="722" actId="1076"/>
-        <pc:sldMkLst>
-          <pc:docMk/>
-          <pc:sldMk cId="1507712031" sldId="285"/>
-        </pc:sldMkLst>
-      </pc:sldChg>
-      <pc:sldChg chg="addSp modSp add mod modNotes">
-        <pc:chgData name="Baráth, Július" userId="aebde9b9-dccc-4475-a9ac-c05e78323d7a" providerId="ADAL" clId="{C5528944-2E53-F544-B48B-F2417BB84345}" dt="2024-04-16T10:33:45.984" v="1008" actId="1076"/>
-        <pc:sldMkLst>
-          <pc:docMk/>
-          <pc:sldMk cId="641753757" sldId="286"/>
-        </pc:sldMkLst>
-      </pc:sldChg>
-      <pc:sldChg chg="new">
-        <pc:chgData name="Baráth, Július" userId="aebde9b9-dccc-4475-a9ac-c05e78323d7a" providerId="ADAL" clId="{C5528944-2E53-F544-B48B-F2417BB84345}" dt="2024-04-16T09:20:13.331" v="863" actId="680"/>
-        <pc:sldMkLst>
-          <pc:docMk/>
-          <pc:sldMk cId="530692227" sldId="287"/>
-        </pc:sldMkLst>
-      </pc:sldChg>
-      <pc:sldChg chg="addSp delSp modSp add del mod chgLayout">
-        <pc:chgData name="Baráth, Július" userId="aebde9b9-dccc-4475-a9ac-c05e78323d7a" providerId="ADAL" clId="{C5528944-2E53-F544-B48B-F2417BB84345}" dt="2024-04-16T09:17:27.044" v="862"/>
-        <pc:sldMkLst>
-          <pc:docMk/>
-          <pc:sldMk cId="1451064174" sldId="288"/>
-        </pc:sldMkLst>
-      </pc:sldChg>
-      <pc:sldChg chg="addSp modSp new mod">
-        <pc:chgData name="Baráth, Július" userId="aebde9b9-dccc-4475-a9ac-c05e78323d7a" providerId="ADAL" clId="{C5528944-2E53-F544-B48B-F2417BB84345}" dt="2024-04-16T09:27:47.863" v="898" actId="1076"/>
-        <pc:sldMkLst>
-          <pc:docMk/>
-          <pc:sldMk cId="3124665059" sldId="289"/>
-        </pc:sldMkLst>
-      </pc:sldChg>
-      <pc:sldChg chg="addSp modSp new mod">
-        <pc:chgData name="Baráth, Július" userId="aebde9b9-dccc-4475-a9ac-c05e78323d7a" providerId="ADAL" clId="{C5528944-2E53-F544-B48B-F2417BB84345}" dt="2024-04-16T09:27:56.978" v="901" actId="1076"/>
-        <pc:sldMkLst>
-          <pc:docMk/>
-          <pc:sldMk cId="4237455161" sldId="290"/>
-        </pc:sldMkLst>
-      </pc:sldChg>
-      <pc:sldChg chg="addSp modSp new mod">
-        <pc:chgData name="Baráth, Július" userId="aebde9b9-dccc-4475-a9ac-c05e78323d7a" providerId="ADAL" clId="{C5528944-2E53-F544-B48B-F2417BB84345}" dt="2024-04-16T09:31:26.163" v="907"/>
-        <pc:sldMkLst>
-          <pc:docMk/>
-          <pc:sldMk cId="3691477181" sldId="291"/>
-        </pc:sldMkLst>
-      </pc:sldChg>
-    </pc:docChg>
-  </pc:docChgLst>
-  <pc:docChgLst>
-    <pc:chgData name="Baráth, Július" userId="aebde9b9-dccc-4475-a9ac-c05e78323d7a" providerId="ADAL" clId="{2F211D81-C385-534D-A6FC-EEEEEA7790D6}"/>
-    <pc:docChg chg="modSld">
-      <pc:chgData name="Baráth, Július" userId="aebde9b9-dccc-4475-a9ac-c05e78323d7a" providerId="ADAL" clId="{2F211D81-C385-534D-A6FC-EEEEEA7790D6}" dt="2024-04-30T05:32:14.114" v="2" actId="1076"/>
-      <pc:docMkLst>
-        <pc:docMk/>
-      </pc:docMkLst>
-      <pc:sldChg chg="modSp mod">
-        <pc:chgData name="Baráth, Július" userId="aebde9b9-dccc-4475-a9ac-c05e78323d7a" providerId="ADAL" clId="{2F211D81-C385-534D-A6FC-EEEEEA7790D6}" dt="2024-04-30T05:32:14.114" v="2" actId="1076"/>
-        <pc:sldMkLst>
-          <pc:docMk/>
-          <pc:sldMk cId="4237455161" sldId="290"/>
-        </pc:sldMkLst>
+        <pc:spChg chg="mod">
+          <ac:chgData name="Baráth, Július" userId="aebde9b9-dccc-4475-a9ac-c05e78323d7a" providerId="ADAL" clId="{4A0811C8-ED2F-505E-B787-C8270CED5046}" dt="2026-04-29T05:43:46.886" v="21" actId="20577"/>
+          <ac:spMkLst>
+            <pc:docMk/>
+            <pc:sldMk cId="3948804769" sldId="261"/>
+            <ac:spMk id="3" creationId="{899B1360-237D-9838-0240-786EA0D1AF71}"/>
+          </ac:spMkLst>
+        </pc:spChg>
       </pc:sldChg>
     </pc:docChg>
   </pc:docChgLst>
@@ -779,7 +260,7 @@
           <a:p>
             <a:fld id="{350F1E12-F430-5B4E-B0D4-F2630604BF05}" type="datetimeFigureOut">
               <a:rPr lang="sk-SK" smtClean="0"/>
-              <a:t>30.4.2025</a:t>
+              <a:t>29.4.2026</a:t>
             </a:fld>
             <a:endParaRPr lang="sk-SK"/>
           </a:p>
@@ -3635,7 +3116,7 @@
           <a:p>
             <a:fld id="{AD8E55F0-49D3-47F0-9F7C-B48EBAF4ED8F}" type="datetimeFigureOut">
               <a:rPr lang="sk-SK" smtClean="0"/>
-              <a:t>30.4.2025</a:t>
+              <a:t>29.4.2026</a:t>
             </a:fld>
             <a:endParaRPr lang="sk-SK"/>
           </a:p>
@@ -3803,7 +3284,7 @@
           <a:p>
             <a:fld id="{AD8E55F0-49D3-47F0-9F7C-B48EBAF4ED8F}" type="datetimeFigureOut">
               <a:rPr lang="sk-SK" smtClean="0"/>
-              <a:t>30.4.2025</a:t>
+              <a:t>29.4.2026</a:t>
             </a:fld>
             <a:endParaRPr lang="sk-SK"/>
           </a:p>
@@ -3981,7 +3462,7 @@
           <a:p>
             <a:fld id="{AD8E55F0-49D3-47F0-9F7C-B48EBAF4ED8F}" type="datetimeFigureOut">
               <a:rPr lang="sk-SK" smtClean="0"/>
-              <a:t>30.4.2025</a:t>
+              <a:t>29.4.2026</a:t>
             </a:fld>
             <a:endParaRPr lang="sk-SK"/>
           </a:p>
@@ -4149,7 +3630,7 @@
           <a:p>
             <a:fld id="{AD8E55F0-49D3-47F0-9F7C-B48EBAF4ED8F}" type="datetimeFigureOut">
               <a:rPr lang="sk-SK" smtClean="0"/>
-              <a:t>30.4.2025</a:t>
+              <a:t>29.4.2026</a:t>
             </a:fld>
             <a:endParaRPr lang="sk-SK"/>
           </a:p>
@@ -4394,7 +3875,7 @@
           <a:p>
             <a:fld id="{AD8E55F0-49D3-47F0-9F7C-B48EBAF4ED8F}" type="datetimeFigureOut">
               <a:rPr lang="sk-SK" smtClean="0"/>
-              <a:t>30.4.2025</a:t>
+              <a:t>29.4.2026</a:t>
             </a:fld>
             <a:endParaRPr lang="sk-SK"/>
           </a:p>
@@ -4623,7 +4104,7 @@
           <a:p>
             <a:fld id="{AD8E55F0-49D3-47F0-9F7C-B48EBAF4ED8F}" type="datetimeFigureOut">
               <a:rPr lang="sk-SK" smtClean="0"/>
-              <a:t>30.4.2025</a:t>
+              <a:t>29.4.2026</a:t>
             </a:fld>
             <a:endParaRPr lang="sk-SK"/>
           </a:p>
@@ -4987,7 +4468,7 @@
           <a:p>
             <a:fld id="{AD8E55F0-49D3-47F0-9F7C-B48EBAF4ED8F}" type="datetimeFigureOut">
               <a:rPr lang="sk-SK" smtClean="0"/>
-              <a:t>30.4.2025</a:t>
+              <a:t>29.4.2026</a:t>
             </a:fld>
             <a:endParaRPr lang="sk-SK"/>
           </a:p>
@@ -5104,7 +4585,7 @@
           <a:p>
             <a:fld id="{AD8E55F0-49D3-47F0-9F7C-B48EBAF4ED8F}" type="datetimeFigureOut">
               <a:rPr lang="sk-SK" smtClean="0"/>
-              <a:t>30.4.2025</a:t>
+              <a:t>29.4.2026</a:t>
             </a:fld>
             <a:endParaRPr lang="sk-SK"/>
           </a:p>
@@ -5199,7 +4680,7 @@
           <a:p>
             <a:fld id="{AD8E55F0-49D3-47F0-9F7C-B48EBAF4ED8F}" type="datetimeFigureOut">
               <a:rPr lang="sk-SK" smtClean="0"/>
-              <a:t>30.4.2025</a:t>
+              <a:t>29.4.2026</a:t>
             </a:fld>
             <a:endParaRPr lang="sk-SK"/>
           </a:p>
@@ -5474,7 +4955,7 @@
           <a:p>
             <a:fld id="{AD8E55F0-49D3-47F0-9F7C-B48EBAF4ED8F}" type="datetimeFigureOut">
               <a:rPr lang="sk-SK" smtClean="0"/>
-              <a:t>30.4.2025</a:t>
+              <a:t>29.4.2026</a:t>
             </a:fld>
             <a:endParaRPr lang="sk-SK"/>
           </a:p>
@@ -5726,7 +5207,7 @@
           <a:p>
             <a:fld id="{AD8E55F0-49D3-47F0-9F7C-B48EBAF4ED8F}" type="datetimeFigureOut">
               <a:rPr lang="sk-SK" smtClean="0"/>
-              <a:t>30.4.2025</a:t>
+              <a:t>29.4.2026</a:t>
             </a:fld>
             <a:endParaRPr lang="sk-SK"/>
           </a:p>
@@ -5937,7 +5418,7 @@
           <a:p>
             <a:fld id="{AD8E55F0-49D3-47F0-9F7C-B48EBAF4ED8F}" type="datetimeFigureOut">
               <a:rPr lang="sk-SK" smtClean="0"/>
-              <a:t>30.4.2025</a:t>
+              <a:t>29.4.2026</a:t>
             </a:fld>
             <a:endParaRPr lang="sk-SK"/>
           </a:p>
@@ -6457,13 +5938,13 @@
           <p:nvPr/>
         </p:nvPicPr>
         <p:blipFill>
-          <a:blip r:embed="rId3">
+          <a:blip>
             <a:extLst>
               <a:ext uri="{28A0092B-C50C-407E-A947-70E740481C1C}">
                 <a14:useLocalDpi xmlns:a14="http://schemas.microsoft.com/office/drawing/2010/main" val="0"/>
               </a:ext>
               <a:ext uri="{96DAC541-7B7A-43D3-8B79-37D633B846F1}">
-                <asvg:svgBlip xmlns:asvg="http://schemas.microsoft.com/office/drawing/2016/SVG/main" r:embed="rId4"/>
+                <asvg:svgBlip xmlns:asvg="http://schemas.microsoft.com/office/drawing/2016/SVG/main" r:embed="rId3"/>
               </a:ext>
             </a:extLst>
           </a:blip>
@@ -6511,7 +5992,7 @@
           <a:p>
             <a:r>
               <a:rPr lang="sk-SK" sz="4800" dirty="0">
-                <a:hlinkClick r:id="rId5"/>
+                <a:hlinkClick r:id="rId4"/>
               </a:rPr>
               <a:t>PollEv.com​/juliusbarath742</a:t>
             </a:r>
@@ -11361,13 +10842,13 @@
           <p:nvPr/>
         </p:nvPicPr>
         <p:blipFill>
-          <a:blip r:embed="rId3">
+          <a:blip>
             <a:extLst>
               <a:ext uri="{28A0092B-C50C-407E-A947-70E740481C1C}">
                 <a14:useLocalDpi xmlns:a14="http://schemas.microsoft.com/office/drawing/2010/main" val="0"/>
               </a:ext>
               <a:ext uri="{96DAC541-7B7A-43D3-8B79-37D633B846F1}">
-                <asvg:svgBlip xmlns:asvg="http://schemas.microsoft.com/office/drawing/2016/SVG/main" r:embed="rId4"/>
+                <asvg:svgBlip xmlns:asvg="http://schemas.microsoft.com/office/drawing/2016/SVG/main" r:embed="rId3"/>
               </a:ext>
             </a:extLst>
           </a:blip>
@@ -11415,7 +10896,7 @@
           <a:p>
             <a:r>
               <a:rPr lang="sk-SK" sz="4800" dirty="0">
-                <a:hlinkClick r:id="rId5"/>
+                <a:hlinkClick r:id="rId4"/>
               </a:rPr>
               <a:t>PollEv.com​/juliusbarath742</a:t>
             </a:r>
@@ -11445,7 +10926,7 @@
             </p:xfrm>
             <a:graphic>
               <a:graphicData uri="http://schemas.microsoft.com/office/webextensions/webextension/2010/11">
-                <we:webextensionref xmlns:we="http://schemas.microsoft.com/office/webextensions/webextension/2010/11" xmlns:r="http://schemas.openxmlformats.org/officeDocument/2006/relationships" r:id="rId6"/>
+                <we:webextensionref xmlns:we="http://schemas.microsoft.com/office/webextensions/webextension/2010/11" xmlns:r="http://schemas.openxmlformats.org/officeDocument/2006/relationships" r:id="rId5"/>
               </a:graphicData>
             </a:graphic>
           </p:graphicFrame>
@@ -11466,7 +10947,7 @@
               <p:nvPr/>
             </p:nvPicPr>
             <p:blipFill>
-              <a:blip r:embed="rId7"/>
+              <a:blip r:embed="rId6"/>
               <a:stretch>
                 <a:fillRect/>
               </a:stretch>
@@ -11585,7 +11066,7 @@
             </a:r>
             <a:r>
               <a:rPr lang="sk-SK" dirty="0"/>
-              <a:t>: V roku 2024 sú technologické spoločnosti, ktoré investovali veľa do generatívnej umelej inteligencie, pod tlakom dokázať, že dokážu zarábať na svojich produktoch. </a:t>
+              <a:t>: V roku 2024-26 sú technologické spoločnosti, ktoré investovali veľa do generatívnej umelej inteligencie, pod tlakom dokázať, že dokážu zarábať na svojich produktoch. </a:t>
             </a:r>
           </a:p>
           <a:p>
@@ -11602,7 +11083,15 @@
             </a:r>
             <a:r>
               <a:rPr lang="sk-SK" dirty="0"/>
-              <a:t> sa snažia ísť touto cestou: obaja vyvíjajú užívateľsky prívetivé platformy, ktoré ľuďom umožňujú prispôsobiť silné jazykové modely a vytvárať vlastné mini </a:t>
+              <a:t> sa snažia ísť touto cestou: obaja vyvíjajú používateľsky prívetivé platformy, ktoré ľuďom umožňujú </a:t>
+            </a:r>
+            <a:r>
+              <a:rPr lang="sk-SK"/>
+              <a:t>prispôsobiť veľké </a:t>
+            </a:r>
+            <a:r>
+              <a:rPr lang="sk-SK" dirty="0"/>
+              <a:t>jazykové modely a vytvárať vlastné mini </a:t>
             </a:r>
             <a:r>
               <a:rPr lang="sk-SK" dirty="0" err="1"/>
